--- a/index/designs/y9-l8/l5-position-words-furniture/l5-position-words-furniture.pptx
+++ b/index/designs/y9-l8/l5-position-words-furniture/l5-position-words-furniture.pptx
@@ -2115,15 +2115,6 @@
               </a:rPr>
               <a:t>上下</a:t>
             </a:r>
-            <a:pPr algn="ctr" indent="0" marL="0">
-              <a:lnSpc>
-                <a:spcPts val="8800"/>
-              </a:lnSpc>
-              <a:spcAft>
-                <a:spcPts val="1200"/>
-              </a:spcAft>
-              <a:buNone/>
-            </a:pPr>
             <a:r>
               <a:rPr lang="en-US" sz="8800" b="1" dirty="0">
                 <a:solidFill>
@@ -2135,15 +2126,6 @@
               </a:rPr>
               <a:t>·</a:t>
             </a:r>
-            <a:pPr algn="ctr" indent="0" marL="0">
-              <a:lnSpc>
-                <a:spcPts val="8800"/>
-              </a:lnSpc>
-              <a:spcAft>
-                <a:spcPts val="1200"/>
-              </a:spcAft>
-              <a:buNone/>
-            </a:pPr>
             <a:r>
               <a:rPr lang="en-US" sz="8800" dirty="0">
                 <a:solidFill>
@@ -3020,12 +3002,6 @@
               </a:rPr>
               <a:t>Teacher models live, thinking aloud: </a:t>
             </a:r>
-            <a:pPr algn="l" indent="0" marL="0">
-              <a:lnSpc>
-                <a:spcPts val="1449"/>
-              </a:lnSpc>
-              <a:buNone/>
-            </a:pPr>
             <a:r>
               <a:rPr lang="en-US" sz="1050" b="1" dirty="0">
                 <a:solidFill>
@@ -3037,12 +3013,6 @@
               </a:rPr>
               <a:t>教室在楼上，办公室在楼下</a:t>
             </a:r>
-            <a:pPr algn="l" indent="0" marL="0">
-              <a:lnSpc>
-                <a:spcPts val="1449"/>
-              </a:lnSpc>
-              <a:buNone/>
-            </a:pPr>
             <a:r>
               <a:rPr lang="en-US" sz="1050" dirty="0">
                 <a:solidFill>
@@ -3054,12 +3024,6 @@
               </a:rPr>
               <a:t>——用'楼上'和'楼下'。</a:t>
             </a:r>
-            <a:pPr algn="l" indent="0" marL="0">
-              <a:lnSpc>
-                <a:spcPts val="1449"/>
-              </a:lnSpc>
-              <a:buNone/>
-            </a:pPr>
             <a:r>
               <a:rPr lang="en-US" sz="1050" b="1" dirty="0">
                 <a:solidFill>
@@ -3071,12 +3035,6 @@
               </a:rPr>
               <a:t>图书馆在餐厅的对面</a:t>
             </a:r>
-            <a:pPr algn="l" indent="0" marL="0">
-              <a:lnSpc>
-                <a:spcPts val="1449"/>
-              </a:lnSpc>
-              <a:buNone/>
-            </a:pPr>
             <a:r>
               <a:rPr lang="en-US" sz="1050" dirty="0">
                 <a:solidFill>
@@ -3201,12 +3159,6 @@
               </a:rPr>
               <a:t>Individual writing (5 min):</a:t>
             </a:r>
-            <a:pPr algn="l" indent="0" marL="0">
-              <a:lnSpc>
-                <a:spcPts val="1449"/>
-              </a:lnSpc>
-              <a:buNone/>
-            </a:pPr>
             <a:r>
               <a:rPr lang="en-US" sz="1050" dirty="0">
                 <a:solidFill>
@@ -3218,12 +3170,6 @@
               </a:rPr>
               <a:t> paragraph (5–6 sentences) using at least </a:t>
             </a:r>
-            <a:pPr algn="l" indent="0" marL="0">
-              <a:lnSpc>
-                <a:spcPts val="1449"/>
-              </a:lnSpc>
-              <a:buNone/>
-            </a:pPr>
             <a:r>
               <a:rPr lang="en-US" sz="1050" b="1" dirty="0">
                 <a:solidFill>
@@ -3235,12 +3181,6 @@
               </a:rPr>
               <a:t>4 different position words</a:t>
             </a:r>
-            <a:pPr algn="l" indent="0" marL="0">
-              <a:lnSpc>
-                <a:spcPts val="1449"/>
-              </a:lnSpc>
-              <a:buNone/>
-            </a:pPr>
             <a:r>
               <a:rPr lang="en-US" sz="1050" dirty="0">
                 <a:solidFill>
@@ -3365,12 +3305,6 @@
               </a:rPr>
               <a:t>Peer-check (2 min):</a:t>
             </a:r>
-            <a:pPr algn="l" indent="0" marL="0">
-              <a:lnSpc>
-                <a:spcPts val="1449"/>
-              </a:lnSpc>
-              <a:buNone/>
-            </a:pPr>
             <a:r>
               <a:rPr lang="en-US" sz="1050" dirty="0">
                 <a:solidFill>
@@ -3498,6 +3432,42 @@
               </a:rPr>
               <a:t>教室在</a:t>
             </a:r>
+            <a:r>
+              <a:rPr lang="en-US" sz="1300" dirty="0">
+                <a:solidFill>
+                  <a:srgbClr val="1A2535"/>
+                </a:solidFill>
+                <a:latin typeface="Noto Serif SC" pitchFamily="34" charset="0"/>
+                <a:ea typeface="Noto Serif SC" pitchFamily="34" charset="-122"/>
+                <a:cs typeface="Noto Serif SC" pitchFamily="34" charset="-120"/>
+              </a:rPr>
+              <a:t>。</a:t>
+            </a:r>
+            <a:endParaRPr lang="en-US" sz="1300" dirty="0"/>
+          </a:p>
+        </p:txBody>
+      </p:sp>
+      <p:sp>
+        <p:nvSpPr>
+          <p:cNvPr id="24" name="Text 22"/>
+          <p:cNvSpPr/>
+          <p:nvPr/>
+        </p:nvSpPr>
+        <p:spPr>
+          <a:xfrm>
+            <a:off x="787301" y="3798540"/>
+            <a:ext cx="5485462" cy="228600"/>
+          </a:xfrm>
+          <a:prstGeom prst="rect">
+            <a:avLst/>
+          </a:prstGeom>
+          <a:noFill/>
+          <a:ln/>
+        </p:spPr>
+        <p:txBody>
+          <a:bodyPr wrap="square" lIns="0" tIns="0" rIns="0" bIns="0" rtlCol="0" anchor="t"/>
+          <a:lstStyle/>
+          <a:p>
             <a:pPr algn="l" indent="0" marL="0">
               <a:spcAft>
                 <a:spcPts val="300"/>
@@ -3513,6 +3483,17 @@
                 <a:ea typeface="Noto Serif SC" pitchFamily="34" charset="-122"/>
                 <a:cs typeface="Noto Serif SC" pitchFamily="34" charset="-120"/>
               </a:rPr>
+              <a:t>办公室在</a:t>
+            </a:r>
+            <a:r>
+              <a:rPr lang="en-US" sz="1300" dirty="0">
+                <a:solidFill>
+                  <a:srgbClr val="1A2535"/>
+                </a:solidFill>
+                <a:latin typeface="Noto Serif SC" pitchFamily="34" charset="0"/>
+                <a:ea typeface="Noto Serif SC" pitchFamily="34" charset="-122"/>
+                <a:cs typeface="Noto Serif SC" pitchFamily="34" charset="-120"/>
+              </a:rPr>
               <a:t>。</a:t>
             </a:r>
             <a:endParaRPr lang="en-US" sz="1300" dirty="0"/>
@@ -3521,13 +3502,13 @@
       </p:sp>
       <p:sp>
         <p:nvSpPr>
-          <p:cNvPr id="24" name="Text 22"/>
-          <p:cNvSpPr/>
-          <p:nvPr/>
-        </p:nvSpPr>
-        <p:spPr>
-          <a:xfrm>
-            <a:off x="787301" y="3798540"/>
+          <p:cNvPr id="25" name="Text 23"/>
+          <p:cNvSpPr/>
+          <p:nvPr/>
+        </p:nvSpPr>
+        <p:spPr>
+          <a:xfrm>
+            <a:off x="787301" y="4065240"/>
             <a:ext cx="5485462" cy="228600"/>
           </a:xfrm>
           <a:prstGeom prst="rect">
@@ -3555,73 +3536,8 @@
                 <a:ea typeface="Noto Serif SC" pitchFamily="34" charset="-122"/>
                 <a:cs typeface="Noto Serif SC" pitchFamily="34" charset="-120"/>
               </a:rPr>
-              <a:t>办公室在</a:t>
-            </a:r>
-            <a:pPr algn="l" indent="0" marL="0">
-              <a:spcAft>
-                <a:spcPts val="300"/>
-              </a:spcAft>
-              <a:buNone/>
-            </a:pPr>
-            <a:r>
-              <a:rPr lang="en-US" sz="1300" dirty="0">
-                <a:solidFill>
-                  <a:srgbClr val="1A2535"/>
-                </a:solidFill>
-                <a:latin typeface="Noto Serif SC" pitchFamily="34" charset="0"/>
-                <a:ea typeface="Noto Serif SC" pitchFamily="34" charset="-122"/>
-                <a:cs typeface="Noto Serif SC" pitchFamily="34" charset="-120"/>
-              </a:rPr>
-              <a:t>。</a:t>
-            </a:r>
-            <a:endParaRPr lang="en-US" sz="1300" dirty="0"/>
-          </a:p>
-        </p:txBody>
-      </p:sp>
-      <p:sp>
-        <p:nvSpPr>
-          <p:cNvPr id="25" name="Text 23"/>
-          <p:cNvSpPr/>
-          <p:nvPr/>
-        </p:nvSpPr>
-        <p:spPr>
-          <a:xfrm>
-            <a:off x="787301" y="4065240"/>
-            <a:ext cx="5485462" cy="228600"/>
-          </a:xfrm>
-          <a:prstGeom prst="rect">
-            <a:avLst/>
-          </a:prstGeom>
-          <a:noFill/>
-          <a:ln/>
-        </p:spPr>
-        <p:txBody>
-          <a:bodyPr wrap="square" lIns="0" tIns="0" rIns="0" bIns="0" rtlCol="0" anchor="t"/>
-          <a:lstStyle/>
-          <a:p>
-            <a:pPr algn="l" indent="0" marL="0">
-              <a:spcAft>
-                <a:spcPts val="300"/>
-              </a:spcAft>
-              <a:buNone/>
-            </a:pPr>
-            <a:r>
-              <a:rPr lang="en-US" sz="1300" dirty="0">
-                <a:solidFill>
-                  <a:srgbClr val="1A2535"/>
-                </a:solidFill>
-                <a:latin typeface="Noto Serif SC" pitchFamily="34" charset="0"/>
-                <a:ea typeface="Noto Serif SC" pitchFamily="34" charset="-122"/>
-                <a:cs typeface="Noto Serif SC" pitchFamily="34" charset="-120"/>
-              </a:rPr>
               <a:t>图书馆在餐厅的</a:t>
             </a:r>
-            <a:pPr algn="l" indent="0" marL="0">
-              <a:spcAft>
-                <a:spcPts val="300"/>
-              </a:spcAft>
-              <a:buNone/>
-            </a:pPr>
             <a:r>
               <a:rPr lang="en-US" sz="1300" dirty="0">
                 <a:solidFill>
@@ -3941,12 +3857,6 @@
               </a:rPr>
               <a:t>OTR 2:</a:t>
             </a:r>
-            <a:pPr algn="l" indent="0" marL="0">
-              <a:lnSpc>
-                <a:spcPts val="1283"/>
-              </a:lnSpc>
-              <a:buNone/>
-            </a:pPr>
             <a:r>
               <a:rPr lang="en-US" sz="950" dirty="0">
                 <a:solidFill>
@@ -6820,12 +6730,6 @@
               </a:rPr>
               <a:t>Rounds 1–2: keep the position word </a:t>
             </a:r>
-            <a:pPr algn="l" indent="0" marL="0">
-              <a:lnSpc>
-                <a:spcPts val="1420"/>
-              </a:lnSpc>
-              <a:buNone/>
-            </a:pPr>
             <a:r>
               <a:rPr lang="en-US" sz="1000" b="1" dirty="0">
                 <a:solidFill>
@@ -6837,12 +6741,6 @@
               </a:rPr>
               <a:t>underlined</a:t>
             </a:r>
-            <a:pPr algn="l" indent="0" marL="0">
-              <a:lnSpc>
-                <a:spcPts val="1420"/>
-              </a:lnSpc>
-              <a:buNone/>
-            </a:pPr>
             <a:r>
               <a:rPr lang="en-US" sz="1000" dirty="0">
                 <a:solidFill>
@@ -6974,12 +6872,6 @@
               </a:rPr>
               <a:t>After winning a round, the pair must generate </a:t>
             </a:r>
-            <a:pPr algn="l" indent="0" marL="0">
-              <a:lnSpc>
-                <a:spcPts val="1420"/>
-              </a:lnSpc>
-              <a:buNone/>
-            </a:pPr>
             <a:r>
               <a:rPr lang="en-US" sz="1000" b="1" dirty="0">
                 <a:solidFill>
@@ -6991,12 +6883,6 @@
               </a:rPr>
               <a:t>one additional original sentence</a:t>
             </a:r>
-            <a:pPr algn="l" indent="0" marL="0">
-              <a:lnSpc>
-                <a:spcPts val="1420"/>
-              </a:lnSpc>
-              <a:buNone/>
-            </a:pPr>
             <a:r>
               <a:rPr lang="en-US" sz="1000" dirty="0">
                 <a:solidFill>
@@ -7650,9 +7536,6 @@
               </a:rPr>
               <a:t>✅ 书在桌子</a:t>
             </a:r>
-            <a:pPr algn="l" indent="0" marL="0">
-              <a:buNone/>
-            </a:pPr>
             <a:r>
               <a:rPr lang="en-US" sz="1900" b="1" u="sng" dirty="0">
                 <a:solidFill>
@@ -7664,9 +7547,6 @@
               </a:rPr>
               <a:t>上面</a:t>
             </a:r>
-            <a:pPr algn="l" indent="0" marL="0">
-              <a:buNone/>
-            </a:pPr>
             <a:r>
               <a:rPr lang="en-US" sz="1900" dirty="0">
                 <a:solidFill>
@@ -7904,9 +7784,6 @@
               </a:rPr>
               <a:t>✅ 黑板在老师的</a:t>
             </a:r>
-            <a:pPr algn="l" indent="0" marL="0">
-              <a:buNone/>
-            </a:pPr>
             <a:r>
               <a:rPr lang="en-US" sz="1900" b="1" u="sng" dirty="0">
                 <a:solidFill>
@@ -7918,9 +7795,6 @@
               </a:rPr>
               <a:t>前面</a:t>
             </a:r>
-            <a:pPr algn="l" indent="0" marL="0">
-              <a:buNone/>
-            </a:pPr>
             <a:r>
               <a:rPr lang="en-US" sz="1900" dirty="0">
                 <a:solidFill>
@@ -8158,9 +8032,6 @@
               </a:rPr>
               <a:t>✅ 图书馆在体育馆的</a:t>
             </a:r>
-            <a:pPr algn="l" indent="0" marL="0">
-              <a:buNone/>
-            </a:pPr>
             <a:r>
               <a:rPr lang="en-US" sz="1900" b="1" u="sng" dirty="0">
                 <a:solidFill>
@@ -8172,9 +8043,6 @@
               </a:rPr>
               <a:t>对面</a:t>
             </a:r>
-            <a:pPr algn="l" indent="0" marL="0">
-              <a:buNone/>
-            </a:pPr>
             <a:r>
               <a:rPr lang="en-US" sz="1900" dirty="0">
                 <a:solidFill>
@@ -8636,9 +8504,6 @@
               </a:rPr>
               <a:t>Hold up fingers: </a:t>
             </a:r>
-            <a:pPr algn="l" indent="0" marL="0">
-              <a:buNone/>
-            </a:pPr>
             <a:r>
               <a:rPr lang="en-US" sz="1000" b="1" dirty="0">
                 <a:solidFill>
@@ -8650,9 +8515,6 @@
               </a:rPr>
               <a:t>3 = 完全可以</a:t>
             </a:r>
-            <a:pPr algn="l" indent="0" marL="0">
-              <a:buNone/>
-            </a:pPr>
             <a:r>
               <a:rPr lang="en-US" sz="1000" dirty="0">
                 <a:solidFill>
@@ -8664,9 +8526,6 @@
               </a:rPr>
               <a:t> · </a:t>
             </a:r>
-            <a:pPr algn="l" indent="0" marL="0">
-              <a:buNone/>
-            </a:pPr>
             <a:r>
               <a:rPr lang="en-US" sz="1000" b="1" dirty="0">
                 <a:solidFill>
@@ -8678,9 +8537,6 @@
               </a:rPr>
               <a:t>2 = 差不多</a:t>
             </a:r>
-            <a:pPr algn="l" indent="0" marL="0">
-              <a:buNone/>
-            </a:pPr>
             <a:r>
               <a:rPr lang="en-US" sz="1000" dirty="0">
                 <a:solidFill>
@@ -8692,9 +8548,6 @@
               </a:rPr>
               <a:t> · </a:t>
             </a:r>
-            <a:pPr algn="l" indent="0" marL="0">
-              <a:buNone/>
-            </a:pPr>
             <a:r>
               <a:rPr lang="en-US" sz="1000" b="1" dirty="0">
                 <a:solidFill>
@@ -8706,9 +8559,6 @@
               </a:rPr>
               <a:t>1 = 还不行</a:t>
             </a:r>
-            <a:pPr algn="l" indent="0" marL="0">
-              <a:buNone/>
-            </a:pPr>
             <a:r>
               <a:rPr lang="en-US" sz="1000" dirty="0">
                 <a:solidFill>
@@ -9615,12 +9465,6 @@
               </a:rPr>
               <a:t>Teacher note:</a:t>
             </a:r>
-            <a:pPr algn="l" indent="0" marL="0">
-              <a:lnSpc>
-                <a:spcPts val="1283"/>
-              </a:lnSpc>
-              <a:buNone/>
-            </a:pPr>
             <a:r>
               <a:rPr lang="en-US" sz="950" dirty="0">
                 <a:solidFill>
@@ -9841,9 +9685,6 @@
               </a:rPr>
               <a:t>我的</a:t>
             </a:r>
-            <a:pPr algn="l" indent="0" marL="0">
-              <a:buNone/>
-            </a:pPr>
             <a:r>
               <a:rPr lang="en-US" sz="1900" dirty="0">
                 <a:solidFill>
@@ -9855,9 +9696,6 @@
               </a:rPr>
               <a:t>在</a:t>
             </a:r>
-            <a:pPr algn="l" indent="0" marL="0">
-              <a:buNone/>
-            </a:pPr>
             <a:r>
               <a:rPr lang="en-US" sz="1900" dirty="0">
                 <a:solidFill>
@@ -9869,9 +9707,6 @@
               </a:rPr>
               <a:t>的</a:t>
             </a:r>
-            <a:pPr algn="l" indent="0" marL="0">
-              <a:buNone/>
-            </a:pPr>
             <a:r>
               <a:rPr lang="en-US" sz="1900" dirty="0">
                 <a:solidFill>
@@ -10453,12 +10288,6 @@
               </a:rPr>
               <a:t>下一课，我们要做</a:t>
             </a:r>
-            <a:pPr algn="ctr" indent="0" marL="0">
-              <a:lnSpc>
-                <a:spcPts val="2175"/>
-              </a:lnSpc>
-              <a:buNone/>
-            </a:pPr>
             <a:r>
               <a:rPr lang="en-US" sz="1450" b="1" dirty="0">
                 <a:solidFill>
@@ -10470,12 +10299,6 @@
               </a:rPr>
               <a:t>两个听力练习</a:t>
             </a:r>
-            <a:pPr algn="ctr" indent="0" marL="0">
-              <a:lnSpc>
-                <a:spcPts val="2175"/>
-              </a:lnSpc>
-              <a:buNone/>
-            </a:pPr>
             <a:r>
               <a:rPr lang="en-US" sz="1450" dirty="0">
                 <a:solidFill>
@@ -10487,12 +10310,6 @@
               </a:rPr>
               <a:t>，还要</a:t>
             </a:r>
-            <a:pPr algn="ctr" indent="0" marL="0">
-              <a:lnSpc>
-                <a:spcPts val="2175"/>
-              </a:lnSpc>
-              <a:buNone/>
-            </a:pPr>
             <a:r>
               <a:rPr lang="en-US" sz="1450" b="1" dirty="0">
                 <a:solidFill>
@@ -10504,12 +10321,6 @@
               </a:rPr>
               <a:t>复习量词</a:t>
             </a:r>
-            <a:pPr algn="ctr" indent="0" marL="0">
-              <a:lnSpc>
-                <a:spcPts val="2175"/>
-              </a:lnSpc>
-              <a:buNone/>
-            </a:pPr>
             <a:r>
               <a:rPr lang="en-US" sz="1450" dirty="0">
                 <a:solidFill>
@@ -10521,12 +10332,6 @@
               </a:rPr>
               <a:t>，玩一个</a:t>
             </a:r>
-            <a:pPr algn="ctr" indent="0" marL="0">
-              <a:lnSpc>
-                <a:spcPts val="2175"/>
-              </a:lnSpc>
-              <a:buNone/>
-            </a:pPr>
             <a:r>
               <a:rPr lang="en-US" sz="1450" b="1" dirty="0">
                 <a:solidFill>
@@ -10538,12 +10343,6 @@
               </a:rPr>
               <a:t>记汉字的游戏</a:t>
             </a:r>
-            <a:pPr algn="ctr" indent="0" marL="0">
-              <a:lnSpc>
-                <a:spcPts val="2175"/>
-              </a:lnSpc>
-              <a:buNone/>
-            </a:pPr>
             <a:r>
               <a:rPr lang="en-US" sz="1450" dirty="0">
                 <a:solidFill>
@@ -11857,12 +11656,6 @@
               </a:rPr>
               <a:t>Project one word at a time. </a:t>
             </a:r>
-            <a:pPr algn="l" indent="0" marL="0">
-              <a:lnSpc>
-                <a:spcPts val="1610"/>
-              </a:lnSpc>
-              <a:buNone/>
-            </a:pPr>
             <a:r>
               <a:rPr lang="en-US" sz="1150" b="1" dirty="0">
                 <a:solidFill>
@@ -12217,12 +12010,6 @@
               </a:rPr>
               <a:t>Cold call two students to correct them, </a:t>
             </a:r>
-            <a:pPr algn="l" indent="0" marL="0">
-              <a:lnSpc>
-                <a:spcPts val="1610"/>
-              </a:lnSpc>
-              <a:buNone/>
-            </a:pPr>
             <a:r>
               <a:rPr lang="en-US" sz="1150" b="1" dirty="0">
                 <a:solidFill>
@@ -12234,12 +12021,6 @@
               </a:rPr>
               <a:t>chorally-echoed by the class</a:t>
             </a:r>
-            <a:pPr algn="l" indent="0" marL="0">
-              <a:lnSpc>
-                <a:spcPts val="1610"/>
-              </a:lnSpc>
-              <a:buNone/>
-            </a:pPr>
             <a:r>
               <a:rPr lang="en-US" sz="1150" dirty="0">
                 <a:solidFill>
@@ -12421,12 +12202,6 @@
               </a:rPr>
               <a:t>"上节课我们学了</a:t>
             </a:r>
-            <a:pPr algn="l" indent="0" marL="0">
-              <a:lnSpc>
-                <a:spcPts val="1875"/>
-              </a:lnSpc>
-              <a:buNone/>
-            </a:pPr>
             <a:r>
               <a:rPr lang="en-US" sz="1250" b="1" dirty="0">
                 <a:solidFill>
@@ -12438,12 +12213,6 @@
               </a:rPr>
               <a:t>五个位置词</a:t>
             </a:r>
-            <a:pPr algn="l" indent="0" marL="0">
-              <a:lnSpc>
-                <a:spcPts val="1875"/>
-              </a:lnSpc>
-              <a:buNone/>
-            </a:pPr>
             <a:r>
               <a:rPr lang="en-US" sz="1250" dirty="0">
                 <a:solidFill>
@@ -12455,12 +12224,6 @@
               </a:rPr>
               <a:t>。今天我们再学</a:t>
             </a:r>
-            <a:pPr algn="l" indent="0" marL="0">
-              <a:lnSpc>
-                <a:spcPts val="1875"/>
-              </a:lnSpc>
-              <a:buNone/>
-            </a:pPr>
             <a:r>
               <a:rPr lang="en-US" sz="1250" b="1" dirty="0">
                 <a:solidFill>
@@ -12472,12 +12235,6 @@
               </a:rPr>
               <a:t>七个新的</a:t>
             </a:r>
-            <a:pPr algn="l" indent="0" marL="0">
-              <a:lnSpc>
-                <a:spcPts val="1875"/>
-              </a:lnSpc>
-              <a:buNone/>
-            </a:pPr>
             <a:r>
               <a:rPr lang="en-US" sz="1250" dirty="0">
                 <a:solidFill>
@@ -12489,12 +12246,6 @@
               </a:rPr>
               <a:t>——用来说东西在桌子'上面'、'下面'，或者教室在楼'上面'还是'下面'。语序规则还是一样：</a:t>
             </a:r>
-            <a:pPr algn="l" indent="0" marL="0">
-              <a:lnSpc>
-                <a:spcPts val="1875"/>
-              </a:lnSpc>
-              <a:buNone/>
-            </a:pPr>
             <a:r>
               <a:rPr lang="en-US" sz="1250" b="1" dirty="0">
                 <a:solidFill>
@@ -12506,12 +12257,6 @@
               </a:rPr>
               <a:t>X在Y的……</a:t>
             </a:r>
-            <a:pPr algn="l" indent="0" marL="0">
-              <a:lnSpc>
-                <a:spcPts val="1875"/>
-              </a:lnSpc>
-              <a:buNone/>
-            </a:pPr>
             <a:r>
               <a:rPr lang="en-US" sz="1250" dirty="0">
                 <a:solidFill>
@@ -13005,12 +12750,6 @@
               </a:rPr>
               <a:t>Fix: </a:t>
             </a:r>
-            <a:pPr algn="l" indent="0" marL="0">
-              <a:spcAft>
-                <a:spcPts val="900"/>
-              </a:spcAft>
-              <a:buNone/>
-            </a:pPr>
             <a:r>
               <a:rPr lang="en-US" sz="1300" dirty="0">
                 <a:solidFill>
@@ -13099,9 +12838,6 @@
               </a:rPr>
               <a:t>✅ 图书馆在礼堂</a:t>
             </a:r>
-            <a:pPr algn="l" indent="0" marL="0">
-              <a:buNone/>
-            </a:pPr>
             <a:r>
               <a:rPr lang="en-US" sz="2200" b="1" u="sng" dirty="0">
                 <a:solidFill>
@@ -13113,9 +12849,6 @@
               </a:rPr>
               <a:t>的旁边</a:t>
             </a:r>
-            <a:pPr algn="l" indent="0" marL="0">
-              <a:buNone/>
-            </a:pPr>
             <a:r>
               <a:rPr lang="en-US" sz="2200" dirty="0">
                 <a:solidFill>
@@ -13276,12 +13009,6 @@
               </a:rPr>
               <a:t>Fix: </a:t>
             </a:r>
-            <a:pPr algn="l" indent="0" marL="0">
-              <a:spcAft>
-                <a:spcPts val="900"/>
-              </a:spcAft>
-              <a:buNone/>
-            </a:pPr>
             <a:r>
               <a:rPr lang="en-US" sz="1300" dirty="0">
                 <a:solidFill>
@@ -13370,9 +13097,6 @@
               </a:rPr>
               <a:t>✅ 操场在体育馆</a:t>
             </a:r>
-            <a:pPr algn="l" indent="0" marL="0">
-              <a:buNone/>
-            </a:pPr>
             <a:r>
               <a:rPr lang="en-US" sz="2200" b="1" u="sng" dirty="0">
                 <a:solidFill>
@@ -13384,9 +13108,6 @@
               </a:rPr>
               <a:t>的左边</a:t>
             </a:r>
-            <a:pPr algn="l" indent="0" marL="0">
-              <a:buNone/>
-            </a:pPr>
             <a:r>
               <a:rPr lang="en-US" sz="2200" dirty="0">
                 <a:solidFill>
@@ -13873,12 +13594,6 @@
               </a:rPr>
               <a:t>We are learning to describe </a:t>
             </a:r>
-            <a:pPr algn="l" indent="0" marL="0">
-              <a:lnSpc>
-                <a:spcPts val="2240"/>
-              </a:lnSpc>
-              <a:buNone/>
-            </a:pPr>
             <a:r>
               <a:rPr lang="en-US" sz="1600" b="1" dirty="0">
                 <a:solidFill>
@@ -13890,12 +13605,6 @@
               </a:rPr>
               <a:t>furniture positions</a:t>
             </a:r>
-            <a:pPr algn="l" indent="0" marL="0">
-              <a:lnSpc>
-                <a:spcPts val="2240"/>
-              </a:lnSpc>
-              <a:buNone/>
-            </a:pPr>
             <a:r>
               <a:rPr lang="en-US" sz="1600" dirty="0">
                 <a:solidFill>
@@ -13907,12 +13616,6 @@
               </a:rPr>
               <a:t> and </a:t>
             </a:r>
-            <a:pPr algn="l" indent="0" marL="0">
-              <a:lnSpc>
-                <a:spcPts val="2240"/>
-              </a:lnSpc>
-              <a:buNone/>
-            </a:pPr>
             <a:r>
               <a:rPr lang="en-US" sz="1600" b="1" dirty="0">
                 <a:solidFill>
@@ -13924,12 +13627,6 @@
               </a:rPr>
               <a:t>building layout</a:t>
             </a:r>
-            <a:pPr algn="l" indent="0" marL="0">
-              <a:lnSpc>
-                <a:spcPts val="2240"/>
-              </a:lnSpc>
-              <a:buNone/>
-            </a:pPr>
             <a:r>
               <a:rPr lang="en-US" sz="1600" dirty="0">
                 <a:solidFill>
@@ -13941,12 +13638,6 @@
               </a:rPr>
               <a:t> using an extended set of position words: </a:t>
             </a:r>
-            <a:pPr algn="l" indent="0" marL="0">
-              <a:lnSpc>
-                <a:spcPts val="2240"/>
-              </a:lnSpc>
-              <a:buNone/>
-            </a:pPr>
             <a:r>
               <a:rPr lang="en-US" sz="1600" b="1" dirty="0">
                 <a:solidFill>
@@ -13958,12 +13649,6 @@
               </a:rPr>
               <a:t>上面、下面、前面、后面、对面、楼上、楼下</a:t>
             </a:r>
-            <a:pPr algn="l" indent="0" marL="0">
-              <a:lnSpc>
-                <a:spcPts val="2240"/>
-              </a:lnSpc>
-              <a:buNone/>
-            </a:pPr>
             <a:r>
               <a:rPr lang="en-US" sz="1600" dirty="0">
                 <a:solidFill>
@@ -16026,12 +15711,6 @@
               </a:rPr>
               <a:t>Variant note:</a:t>
             </a:r>
-            <a:pPr algn="l" indent="0" marL="0">
-              <a:lnSpc>
-                <a:spcPts val="1750"/>
-              </a:lnSpc>
-              <a:buNone/>
-            </a:pPr>
             <a:r>
               <a:rPr lang="en-US" sz="1250" dirty="0">
                 <a:solidFill>
@@ -16118,9 +15797,6 @@
               </a:rPr>
               <a:t>左边</a:t>
             </a:r>
-            <a:pPr algn="ctr" indent="0" marL="0">
-              <a:buNone/>
-            </a:pPr>
             <a:r>
               <a:rPr lang="en-US" sz="1500" dirty="0">
                 <a:solidFill>
@@ -16132,9 +15808,6 @@
               </a:rPr>
               <a:t> = </a:t>
             </a:r>
-            <a:pPr algn="ctr" indent="0" marL="0">
-              <a:buNone/>
-            </a:pPr>
             <a:r>
               <a:rPr lang="en-US" sz="1500" b="1" dirty="0">
                 <a:solidFill>
@@ -16221,9 +15894,6 @@
               </a:rPr>
               <a:t>右边</a:t>
             </a:r>
-            <a:pPr algn="ctr" indent="0" marL="0">
-              <a:buNone/>
-            </a:pPr>
             <a:r>
               <a:rPr lang="en-US" sz="1500" dirty="0">
                 <a:solidFill>
@@ -16235,9 +15905,6 @@
               </a:rPr>
               <a:t> = </a:t>
             </a:r>
-            <a:pPr algn="ctr" indent="0" marL="0">
-              <a:buNone/>
-            </a:pPr>
             <a:r>
               <a:rPr lang="en-US" sz="1500" b="1" dirty="0">
                 <a:solidFill>
@@ -16716,9 +16383,6 @@
               </a:rPr>
               <a:t>X</a:t>
             </a:r>
-            <a:pPr algn="l" indent="0" marL="0">
-              <a:buNone/>
-            </a:pPr>
             <a:r>
               <a:rPr lang="en-US" sz="2400" dirty="0">
                 <a:solidFill>
@@ -16730,9 +16394,6 @@
               </a:rPr>
               <a:t> 在 </a:t>
             </a:r>
-            <a:pPr algn="l" indent="0" marL="0">
-              <a:buNone/>
-            </a:pPr>
             <a:r>
               <a:rPr lang="en-US" sz="2400" b="1" dirty="0">
                 <a:solidFill>
@@ -16744,9 +16405,6 @@
               </a:rPr>
               <a:t>Y</a:t>
             </a:r>
-            <a:pPr algn="l" indent="0" marL="0">
-              <a:buNone/>
-            </a:pPr>
             <a:r>
               <a:rPr lang="en-US" sz="2400" dirty="0">
                 <a:solidFill>
@@ -16758,9 +16416,6 @@
               </a:rPr>
               <a:t> 的 </a:t>
             </a:r>
-            <a:pPr algn="l" indent="0" marL="0">
-              <a:buNone/>
-            </a:pPr>
             <a:r>
               <a:rPr lang="en-US" sz="2400" b="1" dirty="0">
                 <a:solidFill>
@@ -16772,9 +16427,6 @@
               </a:rPr>
               <a:t>position word</a:t>
             </a:r>
-            <a:pPr algn="l" indent="0" marL="0">
-              <a:buNone/>
-            </a:pPr>
             <a:r>
               <a:rPr lang="en-US" sz="2400" dirty="0">
                 <a:solidFill>
@@ -16786,9 +16438,6 @@
               </a:rPr>
               <a:t>。 </a:t>
             </a:r>
-            <a:pPr algn="l" indent="0" marL="0">
-              <a:buNone/>
-            </a:pPr>
             <a:r>
               <a:rPr lang="en-US" sz="1150" dirty="0">
                 <a:solidFill>
@@ -18151,23 +17800,96 @@
               <a:t>Project both:
 </a:t>
             </a:r>
+            <a:r>
+              <a:rPr lang="en-US" sz="1150" b="1" dirty="0">
+                <a:solidFill>
+                  <a:srgbClr val="1A2535"/>
+                </a:solidFill>
+                <a:latin typeface="Noto Sans SC" pitchFamily="34" charset="0"/>
+                <a:ea typeface="Noto Sans SC" pitchFamily="34" charset="-122"/>
+                <a:cs typeface="Noto Sans SC" pitchFamily="34" charset="-120"/>
+              </a:rPr>
+              <a:t>书</a:t>
+            </a:r>
+            <a:r>
+              <a:rPr lang="en-US" sz="1150" b="1" dirty="0">
+                <a:solidFill>
+                  <a:srgbClr val="1A2535"/>
+                </a:solidFill>
+                <a:latin typeface="Noto Sans SC" pitchFamily="34" charset="0"/>
+                <a:ea typeface="Noto Sans SC" pitchFamily="34" charset="-122"/>
+                <a:cs typeface="Noto Sans SC" pitchFamily="34" charset="-120"/>
+              </a:rPr>
+              <a:t>在</a:t>
+            </a:r>
+            <a:r>
+              <a:rPr lang="en-US" sz="1150" b="1" dirty="0">
+                <a:solidFill>
+                  <a:srgbClr val="1A2535"/>
+                </a:solidFill>
+                <a:latin typeface="Noto Sans SC" pitchFamily="34" charset="0"/>
+                <a:ea typeface="Noto Sans SC" pitchFamily="34" charset="-122"/>
+                <a:cs typeface="Noto Sans SC" pitchFamily="34" charset="-120"/>
+              </a:rPr>
+              <a:t>桌子上面</a:t>
+            </a:r>
+            <a:r>
+              <a:rPr lang="en-US" sz="1150" dirty="0">
+                <a:solidFill>
+                  <a:srgbClr val="4E5C6E"/>
+                </a:solidFill>
+                <a:latin typeface="Noto Sans SC" pitchFamily="34" charset="0"/>
+                <a:ea typeface="Noto Sans SC" pitchFamily="34" charset="-122"/>
+                <a:cs typeface="Noto Sans SC" pitchFamily="34" charset="-120"/>
+              </a:rPr>
+              <a:t>
+</a:t>
+            </a:r>
+            <a:r>
+              <a:rPr lang="en-US" sz="1150" b="1" dirty="0">
+                <a:solidFill>
+                  <a:srgbClr val="1A2535"/>
+                </a:solidFill>
+                <a:latin typeface="Noto Sans SC" pitchFamily="34" charset="0"/>
+                <a:ea typeface="Noto Sans SC" pitchFamily="34" charset="-122"/>
+                <a:cs typeface="Noto Sans SC" pitchFamily="34" charset="-120"/>
+              </a:rPr>
+              <a:t>书上面</a:t>
+            </a:r>
+            <a:r>
+              <a:rPr lang="en-US" sz="1150" b="1" dirty="0">
+                <a:solidFill>
+                  <a:srgbClr val="1A2535"/>
+                </a:solidFill>
+                <a:latin typeface="Noto Sans SC" pitchFamily="34" charset="0"/>
+                <a:ea typeface="Noto Sans SC" pitchFamily="34" charset="-122"/>
+                <a:cs typeface="Noto Sans SC" pitchFamily="34" charset="-120"/>
+              </a:rPr>
+              <a:t>在</a:t>
+            </a:r>
+            <a:r>
+              <a:rPr lang="en-US" sz="1150" b="1" dirty="0">
+                <a:solidFill>
+                  <a:srgbClr val="1A2535"/>
+                </a:solidFill>
+                <a:latin typeface="Noto Sans SC" pitchFamily="34" charset="0"/>
+                <a:ea typeface="Noto Sans SC" pitchFamily="34" charset="-122"/>
+                <a:cs typeface="Noto Sans SC" pitchFamily="34" charset="-120"/>
+              </a:rPr>
+              <a:t>桌子</a:t>
+            </a:r>
+            <a:endParaRPr lang="en-US" sz="1150" dirty="0"/>
+          </a:p>
+          <a:p>
             <a:pPr algn="l" indent="0" marL="0">
               <a:lnSpc>
                 <a:spcPts val="1725"/>
               </a:lnSpc>
               <a:buNone/>
             </a:pPr>
-            <a:r>
-              <a:rPr lang="en-US" sz="1150" b="1" dirty="0">
-                <a:solidFill>
-                  <a:srgbClr val="1A2535"/>
-                </a:solidFill>
-                <a:latin typeface="Noto Sans SC" pitchFamily="34" charset="0"/>
-                <a:ea typeface="Noto Sans SC" pitchFamily="34" charset="-122"/>
-                <a:cs typeface="Noto Sans SC" pitchFamily="34" charset="-120"/>
-              </a:rPr>
-              <a:t>书</a:t>
-            </a:r>
+            <a:endParaRPr lang="en-US" sz="1150" dirty="0"/>
+          </a:p>
+          <a:p>
             <a:pPr algn="l" indent="0" marL="0">
               <a:lnSpc>
                 <a:spcPts val="1725"/>
@@ -18175,16 +17897,19 @@
               <a:buNone/>
             </a:pPr>
             <a:r>
-              <a:rPr lang="en-US" sz="1150" b="1" dirty="0">
-                <a:solidFill>
-                  <a:srgbClr val="1A2535"/>
-                </a:solidFill>
-                <a:latin typeface="Noto Sans SC" pitchFamily="34" charset="0"/>
-                <a:ea typeface="Noto Sans SC" pitchFamily="34" charset="-122"/>
-                <a:cs typeface="Noto Sans SC" pitchFamily="34" charset="-120"/>
-              </a:rPr>
-              <a:t>在</a:t>
-            </a:r>
+              <a:rPr lang="en-US" sz="1150" dirty="0">
+                <a:solidFill>
+                  <a:srgbClr val="4E5C6E"/>
+                </a:solidFill>
+                <a:latin typeface="Noto Sans SC" pitchFamily="34" charset="0"/>
+                <a:ea typeface="Noto Sans SC" pitchFamily="34" charset="-122"/>
+                <a:cs typeface="Noto Sans SC" pitchFamily="34" charset="-120"/>
+              </a:rPr>
+              <a:t>Every student </a:t>
+            </a:r>
+            <a:endParaRPr lang="en-US" sz="1150" dirty="0"/>
+          </a:p>
+          <a:p>
             <a:pPr algn="l" indent="0" marL="0">
               <a:lnSpc>
                 <a:spcPts val="1725"/>
@@ -18200,138 +17925,8 @@
                 <a:ea typeface="Noto Sans SC" pitchFamily="34" charset="-122"/>
                 <a:cs typeface="Noto Sans SC" pitchFamily="34" charset="-120"/>
               </a:rPr>
-              <a:t>桌子上面</a:t>
-            </a:r>
-            <a:pPr algn="l" indent="0" marL="0">
-              <a:lnSpc>
-                <a:spcPts val="1725"/>
-              </a:lnSpc>
-              <a:buNone/>
-            </a:pPr>
-            <a:r>
-              <a:rPr lang="en-US" sz="1150" dirty="0">
-                <a:solidFill>
-                  <a:srgbClr val="4E5C6E"/>
-                </a:solidFill>
-                <a:latin typeface="Noto Sans SC" pitchFamily="34" charset="0"/>
-                <a:ea typeface="Noto Sans SC" pitchFamily="34" charset="-122"/>
-                <a:cs typeface="Noto Sans SC" pitchFamily="34" charset="-120"/>
-              </a:rPr>
-              <a:t>
-</a:t>
-            </a:r>
-            <a:pPr algn="l" indent="0" marL="0">
-              <a:lnSpc>
-                <a:spcPts val="1725"/>
-              </a:lnSpc>
-              <a:buNone/>
-            </a:pPr>
-            <a:r>
-              <a:rPr lang="en-US" sz="1150" b="1" dirty="0">
-                <a:solidFill>
-                  <a:srgbClr val="1A2535"/>
-                </a:solidFill>
-                <a:latin typeface="Noto Sans SC" pitchFamily="34" charset="0"/>
-                <a:ea typeface="Noto Sans SC" pitchFamily="34" charset="-122"/>
-                <a:cs typeface="Noto Sans SC" pitchFamily="34" charset="-120"/>
-              </a:rPr>
-              <a:t>书上面</a:t>
-            </a:r>
-            <a:pPr algn="l" indent="0" marL="0">
-              <a:lnSpc>
-                <a:spcPts val="1725"/>
-              </a:lnSpc>
-              <a:buNone/>
-            </a:pPr>
-            <a:r>
-              <a:rPr lang="en-US" sz="1150" b="1" dirty="0">
-                <a:solidFill>
-                  <a:srgbClr val="1A2535"/>
-                </a:solidFill>
-                <a:latin typeface="Noto Sans SC" pitchFamily="34" charset="0"/>
-                <a:ea typeface="Noto Sans SC" pitchFamily="34" charset="-122"/>
-                <a:cs typeface="Noto Sans SC" pitchFamily="34" charset="-120"/>
-              </a:rPr>
-              <a:t>在</a:t>
-            </a:r>
-            <a:pPr algn="l" indent="0" marL="0">
-              <a:lnSpc>
-                <a:spcPts val="1725"/>
-              </a:lnSpc>
-              <a:buNone/>
-            </a:pPr>
-            <a:r>
-              <a:rPr lang="en-US" sz="1150" b="1" dirty="0">
-                <a:solidFill>
-                  <a:srgbClr val="1A2535"/>
-                </a:solidFill>
-                <a:latin typeface="Noto Sans SC" pitchFamily="34" charset="0"/>
-                <a:ea typeface="Noto Sans SC" pitchFamily="34" charset="-122"/>
-                <a:cs typeface="Noto Sans SC" pitchFamily="34" charset="-120"/>
-              </a:rPr>
-              <a:t>桌子</a:t>
-            </a:r>
-            <a:pPr algn="l" indent="0" marL="0">
-              <a:lnSpc>
-                <a:spcPts val="1725"/>
-              </a:lnSpc>
-              <a:buNone/>
-            </a:pPr>
-            <a:endParaRPr lang="en-US" sz="1150" dirty="0"/>
-          </a:p>
-          <a:p>
-            <a:pPr algn="l" indent="0" marL="0">
-              <a:lnSpc>
-                <a:spcPts val="1725"/>
-              </a:lnSpc>
-              <a:buNone/>
-            </a:pPr>
-            <a:endParaRPr lang="en-US" sz="1150" dirty="0"/>
-          </a:p>
-          <a:p>
-            <a:pPr algn="l" indent="0" marL="0">
-              <a:lnSpc>
-                <a:spcPts val="1725"/>
-              </a:lnSpc>
-              <a:buNone/>
-            </a:pPr>
-            <a:r>
-              <a:rPr lang="en-US" sz="1150" dirty="0">
-                <a:solidFill>
-                  <a:srgbClr val="4E5C6E"/>
-                </a:solidFill>
-                <a:latin typeface="Noto Sans SC" pitchFamily="34" charset="0"/>
-                <a:ea typeface="Noto Sans SC" pitchFamily="34" charset="-122"/>
-                <a:cs typeface="Noto Sans SC" pitchFamily="34" charset="-120"/>
-              </a:rPr>
-              <a:t>Every student </a:t>
-            </a:r>
-            <a:endParaRPr lang="en-US" sz="1150" dirty="0"/>
-          </a:p>
-          <a:p>
-            <a:pPr algn="l" indent="0" marL="0">
-              <a:lnSpc>
-                <a:spcPts val="1725"/>
-              </a:lnSpc>
-              <a:buNone/>
-            </a:pPr>
-            <a:r>
-              <a:rPr lang="en-US" sz="1150" b="1" dirty="0">
-                <a:solidFill>
-                  <a:srgbClr val="1A2535"/>
-                </a:solidFill>
-                <a:latin typeface="Noto Sans SC" pitchFamily="34" charset="0"/>
-                <a:ea typeface="Noto Sans SC" pitchFamily="34" charset="-122"/>
-                <a:cs typeface="Noto Sans SC" pitchFamily="34" charset="-120"/>
-              </a:rPr>
               <a:t>points</a:t>
             </a:r>
-            <a:pPr algn="l" indent="0" marL="0">
-              <a:lnSpc>
-                <a:spcPts val="1725"/>
-              </a:lnSpc>
-              <a:buNone/>
-            </a:pPr>
             <a:r>
               <a:rPr lang="en-US" sz="1150" dirty="0">
                 <a:solidFill>
@@ -18572,23 +18167,40 @@
               </a:rPr>
               <a:t>"Sam, </a:t>
             </a:r>
+            <a:r>
+              <a:rPr lang="en-US" sz="1150" b="1" dirty="0">
+                <a:solidFill>
+                  <a:srgbClr val="1A2535"/>
+                </a:solidFill>
+                <a:latin typeface="Noto Sans SC" pitchFamily="34" charset="0"/>
+                <a:ea typeface="Noto Sans SC" pitchFamily="34" charset="-122"/>
+                <a:cs typeface="Noto Sans SC" pitchFamily="34" charset="-120"/>
+              </a:rPr>
+              <a:t>'upstairs'</a:t>
+            </a:r>
+            <a:r>
+              <a:rPr lang="en-US" sz="1150" dirty="0">
+                <a:solidFill>
+                  <a:srgbClr val="4E5C6E"/>
+                </a:solidFill>
+                <a:latin typeface="Noto Sans SC" pitchFamily="34" charset="0"/>
+                <a:ea typeface="Noto Sans SC" pitchFamily="34" charset="-122"/>
+                <a:cs typeface="Noto Sans SC" pitchFamily="34" charset="-120"/>
+              </a:rPr>
+              <a:t> 用中文怎么说？"</a:t>
+            </a:r>
+            <a:endParaRPr lang="en-US" sz="1150" dirty="0"/>
+          </a:p>
+          <a:p>
             <a:pPr algn="l" indent="0" marL="0">
               <a:lnSpc>
                 <a:spcPts val="1725"/>
               </a:lnSpc>
               <a:buNone/>
             </a:pPr>
-            <a:r>
-              <a:rPr lang="en-US" sz="1150" b="1" dirty="0">
-                <a:solidFill>
-                  <a:srgbClr val="1A2535"/>
-                </a:solidFill>
-                <a:latin typeface="Noto Sans SC" pitchFamily="34" charset="0"/>
-                <a:ea typeface="Noto Sans SC" pitchFamily="34" charset="-122"/>
-                <a:cs typeface="Noto Sans SC" pitchFamily="34" charset="-120"/>
-              </a:rPr>
-              <a:t>'upstairs'</a:t>
-            </a:r>
+            <a:endParaRPr lang="en-US" sz="1150" dirty="0"/>
+          </a:p>
+          <a:p>
             <a:pPr algn="l" indent="0" marL="0">
               <a:lnSpc>
                 <a:spcPts val="1725"/>
@@ -18604,7 +18216,7 @@
                 <a:ea typeface="Noto Sans SC" pitchFamily="34" charset="-122"/>
                 <a:cs typeface="Noto Sans SC" pitchFamily="34" charset="-120"/>
               </a:rPr>
-              <a:t> 用中文怎么说？"</a:t>
+              <a:t>"Priya, </a:t>
             </a:r>
             <a:endParaRPr lang="en-US" sz="1150" dirty="0"/>
           </a:p>
@@ -18615,35 +18227,6 @@
               </a:lnSpc>
               <a:buNone/>
             </a:pPr>
-            <a:endParaRPr lang="en-US" sz="1150" dirty="0"/>
-          </a:p>
-          <a:p>
-            <a:pPr algn="l" indent="0" marL="0">
-              <a:lnSpc>
-                <a:spcPts val="1725"/>
-              </a:lnSpc>
-              <a:buNone/>
-            </a:pPr>
-            <a:r>
-              <a:rPr lang="en-US" sz="1150" dirty="0">
-                <a:solidFill>
-                  <a:srgbClr val="4E5C6E"/>
-                </a:solidFill>
-                <a:latin typeface="Noto Sans SC" pitchFamily="34" charset="0"/>
-                <a:ea typeface="Noto Sans SC" pitchFamily="34" charset="-122"/>
-                <a:cs typeface="Noto Sans SC" pitchFamily="34" charset="-120"/>
-              </a:rPr>
-              <a:t>"Priya, </a:t>
-            </a:r>
-            <a:endParaRPr lang="en-US" sz="1150" dirty="0"/>
-          </a:p>
-          <a:p>
-            <a:pPr algn="l" indent="0" marL="0">
-              <a:lnSpc>
-                <a:spcPts val="1725"/>
-              </a:lnSpc>
-              <a:buNone/>
-            </a:pPr>
             <a:r>
               <a:rPr lang="en-US" sz="1150" b="1" dirty="0">
                 <a:solidFill>
@@ -18655,12 +18238,6 @@
               </a:rPr>
               <a:t>'opposite'</a:t>
             </a:r>
-            <a:pPr algn="l" indent="0" marL="0">
-              <a:lnSpc>
-                <a:spcPts val="1725"/>
-              </a:lnSpc>
-              <a:buNone/>
-            </a:pPr>
             <a:r>
               <a:rPr lang="en-US" sz="1150" dirty="0">
                 <a:solidFill>
@@ -18902,12 +18479,6 @@
               <a:t>Teacher points to the projected classroom picture and asks:
 </a:t>
             </a:r>
-            <a:pPr algn="l" indent="0" marL="0">
-              <a:lnSpc>
-                <a:spcPts val="1725"/>
-              </a:lnSpc>
-              <a:buNone/>
-            </a:pPr>
             <a:r>
               <a:rPr lang="en-US" sz="1150" b="1" dirty="0">
                 <a:solidFill>
@@ -19554,9 +19125,6 @@
               </a:rPr>
               <a:t>✅ 黑板在老师</a:t>
             </a:r>
-            <a:pPr algn="l" indent="0" marL="0">
-              <a:buNone/>
-            </a:pPr>
             <a:r>
               <a:rPr lang="en-US" sz="2400" b="1" dirty="0">
                 <a:solidFill>
@@ -19568,9 +19136,6 @@
               </a:rPr>
               <a:t>的前面</a:t>
             </a:r>
-            <a:pPr algn="l" indent="0" marL="0">
-              <a:buNone/>
-            </a:pPr>
             <a:r>
               <a:rPr lang="en-US" sz="2400" dirty="0">
                 <a:solidFill>
@@ -20248,12 +19813,6 @@
               </a:rPr>
               <a:t>Turn-and-talk (2 min):</a:t>
             </a:r>
-            <a:pPr algn="l" indent="0" marL="0">
-              <a:lnSpc>
-                <a:spcPts val="1449"/>
-              </a:lnSpc>
-              <a:buNone/>
-            </a:pPr>
             <a:r>
               <a:rPr lang="en-US" sz="1050" dirty="0">
                 <a:solidFill>
@@ -20378,12 +19937,6 @@
               </a:rPr>
               <a:t>Cold call </a:t>
             </a:r>
-            <a:pPr algn="l" indent="0" marL="0">
-              <a:lnSpc>
-                <a:spcPts val="1449"/>
-              </a:lnSpc>
-              <a:buNone/>
-            </a:pPr>
             <a:r>
               <a:rPr lang="en-US" sz="1050" b="1" dirty="0">
                 <a:solidFill>
@@ -20395,12 +19948,6 @@
               </a:rPr>
               <a:t>3 students</a:t>
             </a:r>
-            <a:pPr algn="l" indent="0" marL="0">
-              <a:lnSpc>
-                <a:spcPts val="1449"/>
-              </a:lnSpc>
-              <a:buNone/>
-            </a:pPr>
             <a:r>
               <a:rPr lang="en-US" sz="1050" dirty="0">
                 <a:solidFill>
